--- a/diagrams/aug/errors/qwen3.pptx
+++ b/diagrams/aug/errors/qwen3.pptx
@@ -243,7 +243,7 @@
           <a:p>
             <a:fld id="{53FBDB0D-4B9C-498E-9619-33EBE6CBBBDD}" type="datetimeFigureOut">
               <a:rPr lang="en-IN" smtClean="0"/>
-              <a:t>31-07-2026</a:t>
+              <a:t>01-08-2026</a:t>
             </a:fld>
             <a:endParaRPr lang="en-IN"/>
           </a:p>
@@ -413,7 +413,7 @@
           <a:p>
             <a:fld id="{53FBDB0D-4B9C-498E-9619-33EBE6CBBBDD}" type="datetimeFigureOut">
               <a:rPr lang="en-IN" smtClean="0"/>
-              <a:t>31-07-2026</a:t>
+              <a:t>01-08-2026</a:t>
             </a:fld>
             <a:endParaRPr lang="en-IN"/>
           </a:p>
@@ -593,7 +593,7 @@
           <a:p>
             <a:fld id="{53FBDB0D-4B9C-498E-9619-33EBE6CBBBDD}" type="datetimeFigureOut">
               <a:rPr lang="en-IN" smtClean="0"/>
-              <a:t>31-07-2026</a:t>
+              <a:t>01-08-2026</a:t>
             </a:fld>
             <a:endParaRPr lang="en-IN"/>
           </a:p>
@@ -763,7 +763,7 @@
           <a:p>
             <a:fld id="{53FBDB0D-4B9C-498E-9619-33EBE6CBBBDD}" type="datetimeFigureOut">
               <a:rPr lang="en-IN" smtClean="0"/>
-              <a:t>31-07-2026</a:t>
+              <a:t>01-08-2026</a:t>
             </a:fld>
             <a:endParaRPr lang="en-IN"/>
           </a:p>
@@ -1007,7 +1007,7 @@
           <a:p>
             <a:fld id="{53FBDB0D-4B9C-498E-9619-33EBE6CBBBDD}" type="datetimeFigureOut">
               <a:rPr lang="en-IN" smtClean="0"/>
-              <a:t>31-07-2026</a:t>
+              <a:t>01-08-2026</a:t>
             </a:fld>
             <a:endParaRPr lang="en-IN"/>
           </a:p>
@@ -1239,7 +1239,7 @@
           <a:p>
             <a:fld id="{53FBDB0D-4B9C-498E-9619-33EBE6CBBBDD}" type="datetimeFigureOut">
               <a:rPr lang="en-IN" smtClean="0"/>
-              <a:t>31-07-2026</a:t>
+              <a:t>01-08-2026</a:t>
             </a:fld>
             <a:endParaRPr lang="en-IN"/>
           </a:p>
@@ -1606,7 +1606,7 @@
           <a:p>
             <a:fld id="{53FBDB0D-4B9C-498E-9619-33EBE6CBBBDD}" type="datetimeFigureOut">
               <a:rPr lang="en-IN" smtClean="0"/>
-              <a:t>31-07-2026</a:t>
+              <a:t>01-08-2026</a:t>
             </a:fld>
             <a:endParaRPr lang="en-IN"/>
           </a:p>
@@ -1724,7 +1724,7 @@
           <a:p>
             <a:fld id="{53FBDB0D-4B9C-498E-9619-33EBE6CBBBDD}" type="datetimeFigureOut">
               <a:rPr lang="en-IN" smtClean="0"/>
-              <a:t>31-07-2026</a:t>
+              <a:t>01-08-2026</a:t>
             </a:fld>
             <a:endParaRPr lang="en-IN"/>
           </a:p>
@@ -1819,7 +1819,7 @@
           <a:p>
             <a:fld id="{53FBDB0D-4B9C-498E-9619-33EBE6CBBBDD}" type="datetimeFigureOut">
               <a:rPr lang="en-IN" smtClean="0"/>
-              <a:t>31-07-2026</a:t>
+              <a:t>01-08-2026</a:t>
             </a:fld>
             <a:endParaRPr lang="en-IN"/>
           </a:p>
@@ -2096,7 +2096,7 @@
           <a:p>
             <a:fld id="{53FBDB0D-4B9C-498E-9619-33EBE6CBBBDD}" type="datetimeFigureOut">
               <a:rPr lang="en-IN" smtClean="0"/>
-              <a:t>31-07-2026</a:t>
+              <a:t>01-08-2026</a:t>
             </a:fld>
             <a:endParaRPr lang="en-IN"/>
           </a:p>
@@ -2353,7 +2353,7 @@
           <a:p>
             <a:fld id="{53FBDB0D-4B9C-498E-9619-33EBE6CBBBDD}" type="datetimeFigureOut">
               <a:rPr lang="en-IN" smtClean="0"/>
-              <a:t>31-07-2026</a:t>
+              <a:t>01-08-2026</a:t>
             </a:fld>
             <a:endParaRPr lang="en-IN"/>
           </a:p>
@@ -2566,7 +2566,7 @@
           <a:p>
             <a:fld id="{53FBDB0D-4B9C-498E-9619-33EBE6CBBBDD}" type="datetimeFigureOut">
               <a:rPr lang="en-IN" smtClean="0"/>
-              <a:t>31-07-2026</a:t>
+              <a:t>01-08-2026</a:t>
             </a:fld>
             <a:endParaRPr lang="en-IN"/>
           </a:p>
@@ -2980,45 +2980,44 @@
           <p:nvPr>
             <p:extLst>
               <p:ext uri="{D42A27DB-BD31-4B8C-83A1-F6EECF244321}">
-                <p14:modId xmlns:p14="http://schemas.microsoft.com/office/powerpoint/2010/main" val="408686670"/>
+                <p14:modId xmlns:p14="http://schemas.microsoft.com/office/powerpoint/2010/main" val="3583594676"/>
               </p:ext>
             </p:extLst>
           </p:nvPr>
         </p:nvGraphicFramePr>
         <p:xfrm>
-          <a:off x="318743" y="2131177"/>
-          <a:ext cx="6220513" cy="5830924"/>
+          <a:off x="106680" y="685801"/>
+          <a:ext cx="6555375" cy="3506695"/>
         </p:xfrm>
         <a:graphic>
           <a:graphicData uri="http://schemas.openxmlformats.org/drawingml/2006/table">
             <a:tbl>
               <a:tblPr firstRow="1" bandRow="1">
-                <a:tableStyleId>{D7AC3CCA-C797-4891-BE02-D94E43425B78}</a:tableStyleId>
+                <a:tableStyleId>{5C22544A-7EE6-4342-B048-85BDC9FD1C3A}</a:tableStyleId>
               </a:tblPr>
               <a:tblGrid>
-                <a:gridCol w="634648">
+                <a:gridCol w="655320">
                   <a:extLst>
                     <a:ext uri="{9D8B030D-6E8A-4147-A177-3AD203B41FA5}">
                       <a16:colId xmlns:a16="http://schemas.microsoft.com/office/drawing/2014/main" xmlns="" val="20000"/>
                     </a:ext>
                   </a:extLst>
                 </a:gridCol>
-                <a:gridCol w="634648"/>
-                <a:gridCol w="1257346">
+                <a:gridCol w="1584960">
                   <a:extLst>
                     <a:ext uri="{9D8B030D-6E8A-4147-A177-3AD203B41FA5}">
                       <a16:colId xmlns:a16="http://schemas.microsoft.com/office/drawing/2014/main" xmlns="" val="20001"/>
                     </a:ext>
                   </a:extLst>
                 </a:gridCol>
-                <a:gridCol w="1533876">
+                <a:gridCol w="1920240">
                   <a:extLst>
                     <a:ext uri="{9D8B030D-6E8A-4147-A177-3AD203B41FA5}">
                       <a16:colId xmlns:a16="http://schemas.microsoft.com/office/drawing/2014/main" xmlns="" val="20002"/>
                     </a:ext>
                   </a:extLst>
                 </a:gridCol>
-                <a:gridCol w="2159995">
+                <a:gridCol w="2394855">
                   <a:extLst>
                     <a:ext uri="{9D8B030D-6E8A-4147-A177-3AD203B41FA5}">
                       <a16:colId xmlns:a16="http://schemas.microsoft.com/office/drawing/2014/main" xmlns="" val="20003"/>
@@ -3026,35 +3025,31 @@
                   </a:extLst>
                 </a:gridCol>
               </a:tblGrid>
-              <a:tr h="267855">
+              <a:tr h="556374">
                 <a:tc>
                   <a:txBody>
                     <a:bodyPr/>
                     <a:lstStyle/>
                     <a:p>
                       <a:r>
-                        <a:rPr lang="en-US" sz="1200" b="0" dirty="0">
+                        <a:rPr lang="en-US" sz="1100" b="1" dirty="0">
                           <a:solidFill>
                             <a:schemeClr val="bg1"/>
                           </a:solidFill>
-                          <a:latin typeface="+mn-lt"/>
-                          <a:cs typeface="Times New Roman" panose="02020603050405020304" pitchFamily="18" charset="0"/>
                         </a:rPr>
                         <a:t>Error </a:t>
                       </a:r>
                     </a:p>
                     <a:p>
                       <a:r>
-                        <a:rPr lang="en-US" sz="1200" b="0" dirty="0">
+                        <a:rPr lang="en-US" sz="1100" b="1" dirty="0">
                           <a:solidFill>
                             <a:schemeClr val="bg1"/>
                           </a:solidFill>
-                          <a:latin typeface="+mn-lt"/>
-                          <a:cs typeface="Times New Roman" panose="02020603050405020304" pitchFamily="18" charset="0"/>
                         </a:rPr>
                         <a:t>Type</a:t>
                       </a:r>
-                      <a:endParaRPr lang="en-GB" sz="1200" b="0" dirty="0">
+                      <a:endParaRPr lang="en-GB" sz="1100" b="1" dirty="0">
                         <a:solidFill>
                           <a:schemeClr val="bg1"/>
                         </a:solidFill>
@@ -3063,11 +3058,7 @@
                       </a:endParaRPr>
                     </a:p>
                   </a:txBody>
-                  <a:tcPr marT="45721" marB="45721">
-                    <a:solidFill>
-                      <a:schemeClr val="accent1"/>
-                    </a:solidFill>
-                  </a:tcPr>
+                  <a:tcPr marT="45721" marB="45721"/>
                 </a:tc>
                 <a:tc>
                   <a:txBody>
@@ -3075,16 +3066,16 @@
                     <a:lstStyle/>
                     <a:p>
                       <a:r>
-                        <a:rPr lang="en-GB" sz="1200" b="0" dirty="0" smtClean="0">
+                        <a:rPr lang="en-US" sz="1100" b="1" dirty="0">
                           <a:solidFill>
                             <a:schemeClr val="bg1"/>
                           </a:solidFill>
-                          <a:latin typeface="+mn-lt"/>
-                          <a:cs typeface="Times New Roman" panose="02020603050405020304" pitchFamily="18" charset="0"/>
-                        </a:rPr>
-                        <a:t>Model</a:t>
-                      </a:r>
-                      <a:endParaRPr lang="en-GB" sz="1200" b="0" dirty="0">
+                        </a:rPr>
+                        <a:t>Source Language: Sanskrit</a:t>
+                      </a:r>
+                    </a:p>
+                    <a:p>
+                      <a:endParaRPr lang="en-GB" sz="1100" b="1" dirty="0">
                         <a:solidFill>
                           <a:schemeClr val="bg1"/>
                         </a:solidFill>
@@ -3093,60 +3084,12 @@
                       </a:endParaRPr>
                     </a:p>
                   </a:txBody>
-                  <a:tcPr marT="45721" marB="45721">
-                    <a:solidFill>
-                      <a:schemeClr val="accent1"/>
-                    </a:solidFill>
-                  </a:tcPr>
+                  <a:tcPr marT="45721" marB="45721"/>
                 </a:tc>
                 <a:tc>
                   <a:txBody>
                     <a:bodyPr/>
                     <a:lstStyle/>
-                    <a:p>
-                      <a:r>
-                        <a:rPr lang="en-US" sz="1200" b="0" dirty="0">
-                          <a:solidFill>
-                            <a:schemeClr val="bg1"/>
-                          </a:solidFill>
-                          <a:latin typeface="+mn-lt"/>
-                          <a:cs typeface="Times New Roman" panose="02020603050405020304" pitchFamily="18" charset="0"/>
-                        </a:rPr>
-                        <a:t>Source Language: Sanskrit</a:t>
-                      </a:r>
-                    </a:p>
-                    <a:p>
-                      <a:endParaRPr lang="en-GB" sz="1050" b="0" dirty="0">
-                        <a:solidFill>
-                          <a:schemeClr val="bg1"/>
-                        </a:solidFill>
-                        <a:latin typeface="+mn-lt"/>
-                        <a:cs typeface="Times New Roman" panose="02020603050405020304" pitchFamily="18" charset="0"/>
-                      </a:endParaRPr>
-                    </a:p>
-                  </a:txBody>
-                  <a:tcPr marT="45721" marB="45721">
-                    <a:solidFill>
-                      <a:schemeClr val="accent1"/>
-                    </a:solidFill>
-                  </a:tcPr>
-                </a:tc>
-                <a:tc>
-                  <a:txBody>
-                    <a:bodyPr/>
-                    <a:lstStyle/>
-                    <a:p>
-                      <a:r>
-                        <a:rPr lang="en-US" sz="1050" b="0" dirty="0">
-                          <a:solidFill>
-                            <a:schemeClr val="bg1"/>
-                          </a:solidFill>
-                          <a:latin typeface="+mn-lt"/>
-                          <a:cs typeface="Times New Roman" panose="02020603050405020304" pitchFamily="18" charset="0"/>
-                        </a:rPr>
-                        <a:t>Target Language:   Hindi</a:t>
-                      </a:r>
-                    </a:p>
                     <a:p>
                       <a:pPr marL="0" marR="0" lvl="0" indent="0" algn="l" defTabSz="685800" rtl="0" eaLnBrk="1" fontAlgn="auto" latinLnBrk="0" hangingPunct="1">
                         <a:lnSpc>
@@ -3166,18 +3109,41 @@
                         <a:defRPr/>
                       </a:pPr>
                       <a:r>
-                        <a:rPr lang="en-US" sz="1200" b="0" dirty="0">
+                        <a:rPr lang="en-US" sz="1100" b="1" dirty="0">
                           <a:solidFill>
                             <a:schemeClr val="bg1"/>
                           </a:solidFill>
-                          <a:latin typeface="+mn-lt"/>
-                          <a:cs typeface="Times New Roman" panose="02020603050405020304" pitchFamily="18" charset="0"/>
                         </a:rPr>
                         <a:t>LLM Hallucination</a:t>
                       </a:r>
                     </a:p>
                     <a:p>
-                      <a:endParaRPr lang="en-US" sz="1050" b="0" dirty="0">
+                      <a:r>
+                        <a:rPr lang="en-US" sz="1100" b="1" dirty="0">
+                          <a:solidFill>
+                            <a:schemeClr val="bg1"/>
+                          </a:solidFill>
+                        </a:rPr>
+                        <a:t>Target Language:   Hindi</a:t>
+                      </a:r>
+                    </a:p>
+                  </a:txBody>
+                  <a:tcPr marT="45721" marB="45721"/>
+                </a:tc>
+                <a:tc>
+                  <a:txBody>
+                    <a:bodyPr/>
+                    <a:lstStyle/>
+                    <a:p>
+                      <a:r>
+                        <a:rPr lang="en-US" sz="1100" b="1" dirty="0">
+                          <a:solidFill>
+                            <a:schemeClr val="bg1"/>
+                          </a:solidFill>
+                        </a:rPr>
+                        <a:t>Explanation</a:t>
+                      </a:r>
+                      <a:endParaRPr lang="en-GB" sz="1100" b="1" dirty="0">
                         <a:solidFill>
                           <a:schemeClr val="bg1"/>
                         </a:solidFill>
@@ -3186,41 +3152,7 @@
                       </a:endParaRPr>
                     </a:p>
                   </a:txBody>
-                  <a:tcPr marT="45721" marB="45721">
-                    <a:solidFill>
-                      <a:schemeClr val="accent1"/>
-                    </a:solidFill>
-                  </a:tcPr>
-                </a:tc>
-                <a:tc>
-                  <a:txBody>
-                    <a:bodyPr/>
-                    <a:lstStyle/>
-                    <a:p>
-                      <a:r>
-                        <a:rPr lang="en-US" sz="1200" b="0" dirty="0">
-                          <a:solidFill>
-                            <a:schemeClr val="bg1"/>
-                          </a:solidFill>
-                          <a:latin typeface="+mn-lt"/>
-                          <a:cs typeface="Times New Roman" panose="02020603050405020304" pitchFamily="18" charset="0"/>
-                        </a:rPr>
-                        <a:t>Explanation</a:t>
-                      </a:r>
-                      <a:endParaRPr lang="en-GB" sz="1200" b="0" dirty="0">
-                        <a:solidFill>
-                          <a:schemeClr val="bg1"/>
-                        </a:solidFill>
-                        <a:latin typeface="+mn-lt"/>
-                        <a:cs typeface="Times New Roman" panose="02020603050405020304" pitchFamily="18" charset="0"/>
-                      </a:endParaRPr>
-                    </a:p>
-                  </a:txBody>
-                  <a:tcPr marT="45721" marB="45721">
-                    <a:solidFill>
-                      <a:schemeClr val="accent1"/>
-                    </a:solidFill>
-                  </a:tcPr>
+                  <a:tcPr marT="45721" marB="45721"/>
                 </a:tc>
                 <a:extLst>
                   <a:ext uri="{0D108BD9-81ED-4DB2-BD59-A6C34878D82A}">
@@ -3228,33 +3160,23 @@
                   </a:ext>
                 </a:extLst>
               </a:tr>
-              <a:tr h="801251">
+              <a:tr h="313853">
                 <a:tc>
                   <a:txBody>
                     <a:bodyPr/>
                     <a:lstStyle/>
                     <a:p>
                       <a:r>
-                        <a:rPr lang="en-US" sz="900" b="1" dirty="0">
-                          <a:latin typeface="+mn-lt"/>
-                          <a:cs typeface="Times New Roman" panose="02020603050405020304" pitchFamily="18" charset="0"/>
-                        </a:rPr>
+                        <a:rPr lang="en-US" sz="700" b="1" dirty="0"/>
                         <a:t>Location</a:t>
                       </a:r>
-                      <a:endParaRPr lang="en-GB" sz="900" b="1" dirty="0">
+                      <a:endParaRPr lang="en-GB" sz="700" b="1" dirty="0">
                         <a:latin typeface="+mn-lt"/>
                         <a:cs typeface="Times New Roman" panose="02020603050405020304" pitchFamily="18" charset="0"/>
                       </a:endParaRPr>
                     </a:p>
                   </a:txBody>
-                  <a:tcPr marT="45721" marB="45721">
-                    <a:solidFill>
-                      <a:schemeClr val="accent1">
-                        <a:lumMod val="20000"/>
-                        <a:lumOff val="80000"/>
-                      </a:schemeClr>
-                    </a:solidFill>
-                  </a:tcPr>
+                  <a:tcPr marT="45721" marB="45721"/>
                 </a:tc>
                 <a:tc>
                   <a:txBody>
@@ -3262,26 +3184,44 @@
                     <a:lstStyle/>
                     <a:p>
                       <a:r>
-                        <a:rPr lang="en-GB" sz="900" b="1" dirty="0" smtClean="0">
-                          <a:latin typeface="+mn-lt"/>
-                          <a:cs typeface="Times New Roman" panose="02020603050405020304" pitchFamily="18" charset="0"/>
-                        </a:rPr>
-                        <a:t>Qwen3</a:t>
-                      </a:r>
-                      <a:endParaRPr lang="en-GB" sz="900" b="1" dirty="0">
+                        <a:rPr lang="hi-IN" sz="700" b="0" kern="1200" dirty="0">
+                          <a:solidFill>
+                            <a:schemeClr val="dk1"/>
+                          </a:solidFill>
+                          <a:effectLst/>
+                        </a:rPr>
+                        <a:t>ह.. ह.. इदं न </a:t>
+                      </a:r>
+                      <a:r>
+                        <a:rPr lang="hi-IN" sz="700" b="0" kern="1200" dirty="0">
+                          <a:solidFill>
+                            <a:srgbClr val="FF0000"/>
+                          </a:solidFill>
+                          <a:effectLst/>
+                        </a:rPr>
+                        <a:t>गुर्गांव् नगरम्</a:t>
+                      </a:r>
+                      <a:r>
+                        <a:rPr lang="hi-IN" sz="700" b="0" kern="1200" dirty="0">
+                          <a:solidFill>
+                            <a:schemeClr val="dk1"/>
+                          </a:solidFill>
+                          <a:effectLst/>
+                        </a:rPr>
+                        <a:t>।</a:t>
+                      </a:r>
+                      <a:endParaRPr lang="hi-IN" sz="700" b="0" kern="1200" dirty="0">
+                        <a:solidFill>
+                          <a:schemeClr val="dk1"/>
+                        </a:solidFill>
+                        <a:effectLst/>
                         <a:latin typeface="+mn-lt"/>
-                        <a:cs typeface="Times New Roman" panose="02020603050405020304" pitchFamily="18" charset="0"/>
+                        <a:ea typeface="+mn-ea"/>
+                        <a:cs typeface="+mn-cs"/>
                       </a:endParaRPr>
                     </a:p>
                   </a:txBody>
-                  <a:tcPr marT="45721" marB="45721">
-                    <a:solidFill>
-                      <a:schemeClr val="accent1">
-                        <a:lumMod val="20000"/>
-                        <a:lumOff val="80000"/>
-                      </a:schemeClr>
-                    </a:solidFill>
-                  </a:tcPr>
+                  <a:tcPr marT="45721" marB="45721"/>
                 </a:tc>
                 <a:tc>
                   <a:txBody>
@@ -3289,51 +3229,44 @@
                     <a:lstStyle/>
                     <a:p>
                       <a:r>
-                        <a:rPr lang="hi-IN" sz="900" b="0" kern="1200" dirty="0">
+                        <a:rPr lang="hi-IN" sz="700" b="0" kern="1200" dirty="0">
                           <a:solidFill>
                             <a:schemeClr val="dk1"/>
                           </a:solidFill>
                           <a:effectLst/>
-                          <a:latin typeface="+mn-lt"/>
-                          <a:ea typeface="+mn-ea"/>
-                          <a:cs typeface="+mn-cs"/>
-                        </a:rPr>
-                        <a:t>ह.. ह.. इदं न </a:t>
-                      </a:r>
-                      <a:r>
-                        <a:rPr lang="hi-IN" sz="900" b="0" kern="1200" dirty="0">
+                        </a:rPr>
+                        <a:t>ह... ह... यह </a:t>
+                      </a:r>
+                      <a:r>
+                        <a:rPr lang="hi-IN" sz="700" b="0" kern="1200" dirty="0">
                           <a:solidFill>
                             <a:srgbClr val="FF0000"/>
                           </a:solidFill>
                           <a:effectLst/>
-                          <a:latin typeface="+mn-lt"/>
-                          <a:ea typeface="+mn-ea"/>
-                          <a:cs typeface="+mn-cs"/>
-                        </a:rPr>
-                        <a:t>गुर्गांव् नगरम्</a:t>
-                      </a:r>
-                      <a:r>
-                        <a:rPr lang="hi-IN" sz="900" b="0" kern="1200" dirty="0">
+                        </a:rPr>
+                        <a:t>गूर्जां नागर </a:t>
+                      </a:r>
+                      <a:r>
+                        <a:rPr lang="hi-IN" sz="700" b="0" kern="1200" dirty="0">
                           <a:solidFill>
                             <a:schemeClr val="dk1"/>
                           </a:solidFill>
                           <a:effectLst/>
-                          <a:latin typeface="+mn-lt"/>
-                          <a:ea typeface="+mn-ea"/>
-                          <a:cs typeface="+mn-cs"/>
-                        </a:rPr>
-                        <a:t>।</a:t>
-                      </a:r>
+                        </a:rPr>
+                        <a:t>में अन्तरित नहीं है।</a:t>
+                      </a:r>
+                      <a:endParaRPr lang="hi-IN" sz="700" b="0" kern="1200" dirty="0">
+                        <a:solidFill>
+                          <a:schemeClr val="dk1"/>
+                        </a:solidFill>
+                        <a:effectLst/>
+                        <a:latin typeface="+mn-lt"/>
+                        <a:ea typeface="+mn-ea"/>
+                        <a:cs typeface="+mn-cs"/>
+                      </a:endParaRPr>
                     </a:p>
                   </a:txBody>
-                  <a:tcPr marT="45721" marB="45721">
-                    <a:solidFill>
-                      <a:schemeClr val="accent1">
-                        <a:lumMod val="20000"/>
-                        <a:lumOff val="80000"/>
-                      </a:schemeClr>
-                    </a:solidFill>
-                  </a:tcPr>
+                  <a:tcPr marT="45721" marB="45721"/>
                 </a:tc>
                 <a:tc>
                   <a:txBody>
@@ -3341,102 +3274,24 @@
                     <a:lstStyle/>
                     <a:p>
                       <a:r>
-                        <a:rPr lang="hi-IN" sz="900" b="0" kern="1200" dirty="0">
-                          <a:solidFill>
-                            <a:schemeClr val="dk1"/>
-                          </a:solidFill>
-                          <a:effectLst/>
-                          <a:latin typeface="+mn-lt"/>
-                          <a:ea typeface="+mn-ea"/>
-                          <a:cs typeface="+mn-cs"/>
-                        </a:rPr>
-                        <a:t>ह... ह... यह </a:t>
-                      </a:r>
-                      <a:r>
-                        <a:rPr lang="hi-IN" sz="900" b="0" kern="1200" dirty="0">
-                          <a:solidFill>
-                            <a:srgbClr val="FF0000"/>
-                          </a:solidFill>
-                          <a:effectLst/>
-                          <a:latin typeface="+mn-lt"/>
-                          <a:ea typeface="+mn-ea"/>
-                          <a:cs typeface="+mn-cs"/>
-                        </a:rPr>
-                        <a:t>गूर्जां नागर </a:t>
-                      </a:r>
-                      <a:r>
-                        <a:rPr lang="hi-IN" sz="900" b="0" kern="1200" dirty="0">
-                          <a:solidFill>
-                            <a:schemeClr val="dk1"/>
-                          </a:solidFill>
-                          <a:effectLst/>
-                          <a:latin typeface="+mn-lt"/>
-                          <a:ea typeface="+mn-ea"/>
-                          <a:cs typeface="+mn-cs"/>
-                        </a:rPr>
-                        <a:t>में अन्तरित नहीं है।</a:t>
-                      </a:r>
+                        <a:rPr lang="en-US" sz="800" b="0" dirty="0" smtClean="0"/>
+                        <a:t>The model hallucinates the location entity by altering Gurgaon to </a:t>
+                      </a:r>
+                      <a:r>
+                        <a:rPr lang="en-US" sz="800" b="0" dirty="0" err="1" smtClean="0"/>
+                        <a:t>Gurjan</a:t>
+                      </a:r>
+                      <a:r>
+                        <a:rPr lang="en-US" sz="800" b="0" dirty="0" smtClean="0"/>
+                        <a:t> Nagar.</a:t>
+                      </a:r>
+                      <a:endParaRPr lang="en-US" sz="800" b="0" dirty="0">
+                        <a:latin typeface="+mn-lt"/>
+                        <a:cs typeface="Times New Roman" panose="02020603050405020304" pitchFamily="18" charset="0"/>
+                      </a:endParaRPr>
                     </a:p>
                   </a:txBody>
-                  <a:tcPr marT="45721" marB="45721">
-                    <a:solidFill>
-                      <a:schemeClr val="accent1">
-                        <a:lumMod val="20000"/>
-                        <a:lumOff val="80000"/>
-                      </a:schemeClr>
-                    </a:solidFill>
-                  </a:tcPr>
-                </a:tc>
-                <a:tc>
-                  <a:txBody>
-                    <a:bodyPr/>
-                    <a:lstStyle/>
-                    <a:p>
-                      <a:r>
-                        <a:rPr lang="en-US" sz="900" b="0" dirty="0">
-                          <a:latin typeface="+mn-lt"/>
-                          <a:cs typeface="Times New Roman" panose="02020603050405020304" pitchFamily="18" charset="0"/>
-                        </a:rPr>
-                        <a:t>The model hallucinates a non-existent place name “</a:t>
-                      </a:r>
-                      <a:r>
-                        <a:rPr lang="en-US" sz="900" b="0" dirty="0" err="1">
-                          <a:latin typeface="+mn-lt"/>
-                          <a:cs typeface="Times New Roman" panose="02020603050405020304" pitchFamily="18" charset="0"/>
-                        </a:rPr>
-                        <a:t>Gurjan</a:t>
-                      </a:r>
-                      <a:r>
-                        <a:rPr lang="en-US" sz="900" b="0" dirty="0">
-                          <a:latin typeface="+mn-lt"/>
-                          <a:cs typeface="Times New Roman" panose="02020603050405020304" pitchFamily="18" charset="0"/>
-                        </a:rPr>
-                        <a:t> Nagar” instead of “Gurgaon” and further distorts a simple negation into an ungrammatical phrase, showing both </a:t>
-                      </a:r>
-                      <a:r>
-                        <a:rPr lang="en-US" sz="900" b="0" dirty="0" err="1">
-                          <a:latin typeface="+mn-lt"/>
-                          <a:cs typeface="Times New Roman" panose="02020603050405020304" pitchFamily="18" charset="0"/>
-                        </a:rPr>
-                        <a:t>toponym</a:t>
-                      </a:r>
-                      <a:r>
-                        <a:rPr lang="en-US" sz="900" b="0" dirty="0">
-                          <a:latin typeface="+mn-lt"/>
-                          <a:cs typeface="Times New Roman" panose="02020603050405020304" pitchFamily="18" charset="0"/>
-                        </a:rPr>
-                        <a:t> fabrication and semantic drift.</a:t>
-                      </a:r>
-                    </a:p>
-                  </a:txBody>
-                  <a:tcPr marT="45721" marB="45721">
-                    <a:solidFill>
-                      <a:schemeClr val="accent1">
-                        <a:lumMod val="20000"/>
-                        <a:lumOff val="80000"/>
-                      </a:schemeClr>
-                    </a:solidFill>
-                  </a:tcPr>
+                  <a:tcPr marT="45721" marB="45721"/>
                 </a:tc>
                 <a:extLst>
                   <a:ext uri="{0D108BD9-81ED-4DB2-BD59-A6C34878D82A}">
@@ -3444,29 +3299,23 @@
                   </a:ext>
                 </a:extLst>
               </a:tr>
-              <a:tr h="808756">
+              <a:tr h="427980">
                 <a:tc>
                   <a:txBody>
                     <a:bodyPr/>
                     <a:lstStyle/>
                     <a:p>
                       <a:r>
-                        <a:rPr lang="en-GB" sz="900" b="1" dirty="0">
-                          <a:latin typeface="+mn-lt"/>
-                          <a:cs typeface="Times New Roman" panose="02020603050405020304" pitchFamily="18" charset="0"/>
-                        </a:rPr>
+                        <a:rPr lang="en-GB" sz="700" b="1" dirty="0"/>
                         <a:t>Negation</a:t>
                       </a:r>
+                      <a:endParaRPr lang="en-GB" sz="700" b="1" dirty="0">
+                        <a:latin typeface="+mn-lt"/>
+                        <a:cs typeface="Times New Roman" panose="02020603050405020304" pitchFamily="18" charset="0"/>
+                      </a:endParaRPr>
                     </a:p>
                   </a:txBody>
-                  <a:tcPr marT="45721" marB="45721">
-                    <a:solidFill>
-                      <a:schemeClr val="accent1">
-                        <a:lumMod val="20000"/>
-                        <a:lumOff val="80000"/>
-                      </a:schemeClr>
-                    </a:solidFill>
-                  </a:tcPr>
+                  <a:tcPr marT="45721" marB="45721"/>
                 </a:tc>
                 <a:tc>
                   <a:txBody>
@@ -3474,26 +3323,62 @@
                     <a:lstStyle/>
                     <a:p>
                       <a:r>
-                        <a:rPr lang="en-GB" sz="900" b="1" dirty="0" smtClean="0">
-                          <a:latin typeface="+mn-lt"/>
-                          <a:cs typeface="Times New Roman" panose="02020603050405020304" pitchFamily="18" charset="0"/>
-                        </a:rPr>
-                        <a:t>Qwen3</a:t>
-                      </a:r>
-                      <a:endParaRPr lang="en-GB" sz="900" b="1" dirty="0">
+                        <a:rPr lang="hi-IN" sz="700" b="0" kern="1200" dirty="0">
+                          <a:solidFill>
+                            <a:schemeClr val="dk1"/>
+                          </a:solidFill>
+                          <a:effectLst/>
+                        </a:rPr>
+                        <a:t>एते </a:t>
+                      </a:r>
+                      <a:r>
+                        <a:rPr lang="hi-IN" sz="700" b="0" kern="1200" dirty="0">
+                          <a:solidFill>
+                            <a:srgbClr val="FF0000"/>
+                          </a:solidFill>
+                          <a:effectLst/>
+                        </a:rPr>
+                        <a:t>न केवलं </a:t>
+                      </a:r>
+                      <a:r>
+                        <a:rPr lang="hi-IN" sz="700" b="0" kern="1200" dirty="0">
+                          <a:solidFill>
+                            <a:schemeClr val="dk1"/>
+                          </a:solidFill>
+                          <a:effectLst/>
+                        </a:rPr>
+                        <a:t>दुरासक्तिं </a:t>
+                      </a:r>
+                      <a:r>
+                        <a:rPr lang="hi-IN" sz="700" b="0" kern="1200" dirty="0">
+                          <a:solidFill>
+                            <a:schemeClr val="tx1"/>
+                          </a:solidFill>
+                          <a:effectLst/>
+                        </a:rPr>
+                        <a:t>जनयन्ति परं गोर्दस्योपरि </a:t>
+                      </a:r>
+                      <a:r>
+                        <a:rPr lang="hi-IN" sz="700" b="0" kern="1200" dirty="0">
+                          <a:solidFill>
+                            <a:schemeClr val="dk1"/>
+                          </a:solidFill>
+                          <a:effectLst/>
+                        </a:rPr>
+                        <a:t>दुष्परिणामन् जनयन्ति च।</a:t>
+                      </a:r>
+                      <a:endParaRPr lang="hi-IN" sz="700" b="0" kern="1200" dirty="0">
+                        <a:solidFill>
+                          <a:schemeClr val="dk1"/>
+                        </a:solidFill>
+                        <a:effectLst/>
                         <a:latin typeface="+mn-lt"/>
-                        <a:cs typeface="Times New Roman" panose="02020603050405020304" pitchFamily="18" charset="0"/>
+                        <a:ea typeface="+mn-ea"/>
+                        <a:cs typeface="+mn-cs"/>
                       </a:endParaRPr>
                     </a:p>
                   </a:txBody>
-                  <a:tcPr marT="45721" marB="45721">
-                    <a:solidFill>
-                      <a:schemeClr val="accent1">
-                        <a:lumMod val="20000"/>
-                        <a:lumOff val="80000"/>
-                      </a:schemeClr>
-                    </a:solidFill>
-                  </a:tcPr>
+                  <a:tcPr marT="45721" marB="45721"/>
                 </a:tc>
                 <a:tc>
                   <a:txBody>
@@ -3501,51 +3386,62 @@
                     <a:lstStyle/>
                     <a:p>
                       <a:r>
-                        <a:rPr lang="hi-IN" sz="900" b="0" kern="1200" dirty="0">
+                        <a:rPr lang="hi-IN" sz="700" b="0" kern="1200" dirty="0">
                           <a:solidFill>
                             <a:schemeClr val="dk1"/>
                           </a:solidFill>
                           <a:effectLst/>
-                          <a:latin typeface="+mn-lt"/>
-                          <a:ea typeface="+mn-ea"/>
-                          <a:cs typeface="+mn-cs"/>
-                        </a:rPr>
-                        <a:t>एते न केवलं दुरासक्तिं जनयन्ति परं </a:t>
-                      </a:r>
-                      <a:r>
-                        <a:rPr lang="hi-IN" sz="900" b="0" kern="1200" dirty="0">
+                        </a:rPr>
+                        <a:t>इनमें से </a:t>
+                      </a:r>
+                      <a:r>
+                        <a:rPr lang="hi-IN" sz="700" b="0" kern="1200" dirty="0">
                           <a:solidFill>
                             <a:srgbClr val="FF0000"/>
                           </a:solidFill>
                           <a:effectLst/>
-                          <a:latin typeface="+mn-lt"/>
-                          <a:ea typeface="+mn-ea"/>
-                          <a:cs typeface="+mn-cs"/>
-                        </a:rPr>
-                        <a:t>गोर्दस्योपरि</a:t>
-                      </a:r>
-                      <a:r>
-                        <a:rPr lang="hi-IN" sz="900" b="0" kern="1200" dirty="0">
+                        </a:rPr>
+                        <a:t>केबल अच्छी नहीं है</a:t>
+                      </a:r>
+                      <a:r>
+                        <a:rPr lang="hi-IN" sz="700" b="0" kern="1200" dirty="0">
                           <a:solidFill>
                             <a:schemeClr val="dk1"/>
                           </a:solidFill>
                           <a:effectLst/>
-                          <a:latin typeface="+mn-lt"/>
-                          <a:ea typeface="+mn-ea"/>
-                          <a:cs typeface="+mn-cs"/>
-                        </a:rPr>
-                        <a:t> दुष्परिणामन् जनयन्ति च।</a:t>
-                      </a:r>
+                        </a:rPr>
+                        <a:t>, और उनका </a:t>
+                      </a:r>
+                      <a:r>
+                        <a:rPr lang="hi-IN" sz="700" b="0" kern="1200" dirty="0">
+                          <a:solidFill>
+                            <a:schemeClr val="tx1"/>
+                          </a:solidFill>
+                          <a:effectLst/>
+                        </a:rPr>
+                        <a:t>ऊपर गौर्डस्थ </a:t>
+                      </a:r>
+                      <a:r>
+                        <a:rPr lang="hi-IN" sz="700" b="0" kern="1200" dirty="0">
+                          <a:solidFill>
+                            <a:schemeClr val="dk1"/>
+                          </a:solidFill>
+                          <a:effectLst/>
+                        </a:rPr>
+                        <a:t>के ऊर्ध्व में भी खराब परिफल उत्पन्न करते हूँ।</a:t>
+                      </a:r>
+                      <a:endParaRPr lang="hi-IN" sz="700" b="0" kern="1200" dirty="0">
+                        <a:solidFill>
+                          <a:schemeClr val="dk1"/>
+                        </a:solidFill>
+                        <a:effectLst/>
+                        <a:latin typeface="+mn-lt"/>
+                        <a:ea typeface="+mn-ea"/>
+                        <a:cs typeface="+mn-cs"/>
+                      </a:endParaRPr>
                     </a:p>
                   </a:txBody>
-                  <a:tcPr marT="45721" marB="45721">
-                    <a:solidFill>
-                      <a:schemeClr val="accent1">
-                        <a:lumMod val="20000"/>
-                        <a:lumOff val="80000"/>
-                      </a:schemeClr>
-                    </a:solidFill>
-                  </a:tcPr>
+                  <a:tcPr marT="45721" marB="45721"/>
                 </a:tc>
                 <a:tc>
                   <a:txBody>
@@ -3553,115 +3449,16 @@
                     <a:lstStyle/>
                     <a:p>
                       <a:r>
-                        <a:rPr lang="hi-IN" sz="900" b="0" kern="1200" dirty="0">
-                          <a:solidFill>
-                            <a:schemeClr val="dk1"/>
-                          </a:solidFill>
-                          <a:effectLst/>
-                          <a:latin typeface="+mn-lt"/>
-                          <a:ea typeface="+mn-ea"/>
-                          <a:cs typeface="+mn-cs"/>
-                        </a:rPr>
-                        <a:t>इनमें से केबल अच्छी नहीं है, और उनका ऊपर </a:t>
-                      </a:r>
-                      <a:r>
-                        <a:rPr lang="hi-IN" sz="900" b="0" kern="1200" dirty="0">
-                          <a:solidFill>
-                            <a:srgbClr val="FF0000"/>
-                          </a:solidFill>
-                          <a:effectLst/>
-                          <a:latin typeface="+mn-lt"/>
-                          <a:ea typeface="+mn-ea"/>
-                          <a:cs typeface="+mn-cs"/>
-                        </a:rPr>
-                        <a:t>गौर्डस्थ</a:t>
-                      </a:r>
-                      <a:r>
-                        <a:rPr lang="hi-IN" sz="900" b="0" kern="1200" dirty="0">
-                          <a:solidFill>
-                            <a:schemeClr val="dk1"/>
-                          </a:solidFill>
-                          <a:effectLst/>
-                          <a:latin typeface="+mn-lt"/>
-                          <a:ea typeface="+mn-ea"/>
-                          <a:cs typeface="+mn-cs"/>
-                        </a:rPr>
-                        <a:t> के ऊर्ध्व में भी खराब परिफल उत्पन्न करते हूँ।</a:t>
-                      </a:r>
+                        <a:rPr lang="en-US" sz="800" b="0" dirty="0" smtClean="0"/>
+                        <a:t>The model incorrectly translates the negative condition, changing not only into is only not good.</a:t>
+                      </a:r>
+                      <a:endParaRPr lang="en-IN" sz="800" b="0" dirty="0">
+                        <a:latin typeface="+mn-lt"/>
+                        <a:cs typeface="Times New Roman" panose="02020603050405020304" pitchFamily="18" charset="0"/>
+                      </a:endParaRPr>
                     </a:p>
                   </a:txBody>
-                  <a:tcPr marT="45721" marB="45721">
-                    <a:solidFill>
-                      <a:schemeClr val="accent1">
-                        <a:lumMod val="20000"/>
-                        <a:lumOff val="80000"/>
-                      </a:schemeClr>
-                    </a:solidFill>
-                  </a:tcPr>
-                </a:tc>
-                <a:tc>
-                  <a:txBody>
-                    <a:bodyPr/>
-                    <a:lstStyle/>
-                    <a:p>
-                      <a:r>
-                        <a:rPr lang="en-IN" sz="900" b="0" dirty="0">
-                          <a:latin typeface="+mn-lt"/>
-                          <a:cs typeface="Times New Roman" panose="02020603050405020304" pitchFamily="18" charset="0"/>
-                        </a:rPr>
-                        <a:t>The model hallucinated a non-existent </a:t>
-                      </a:r>
-                      <a:r>
-                        <a:rPr lang="en-IN" sz="900" b="0" dirty="0" err="1">
-                          <a:latin typeface="+mn-lt"/>
-                          <a:cs typeface="Times New Roman" panose="02020603050405020304" pitchFamily="18" charset="0"/>
-                        </a:rPr>
-                        <a:t>toponym</a:t>
-                      </a:r>
-                      <a:r>
-                        <a:rPr lang="en-IN" sz="900" b="0" dirty="0">
-                          <a:latin typeface="+mn-lt"/>
-                          <a:cs typeface="Times New Roman" panose="02020603050405020304" pitchFamily="18" charset="0"/>
-                        </a:rPr>
-                        <a:t>-like entity “</a:t>
-                      </a:r>
-                      <a:r>
-                        <a:rPr lang="en-IN" sz="900" b="0" dirty="0" err="1">
-                          <a:latin typeface="+mn-lt"/>
-                          <a:cs typeface="Times New Roman" panose="02020603050405020304" pitchFamily="18" charset="0"/>
-                        </a:rPr>
-                        <a:t>Gourdsth</a:t>
-                      </a:r>
-                      <a:r>
-                        <a:rPr lang="en-IN" sz="900" b="0" dirty="0">
-                          <a:latin typeface="+mn-lt"/>
-                          <a:cs typeface="Times New Roman" panose="02020603050405020304" pitchFamily="18" charset="0"/>
-                        </a:rPr>
-                        <a:t>”</a:t>
-                      </a:r>
-                      <a:r>
-                        <a:rPr lang="hi-IN" sz="900" b="0" dirty="0">
-                          <a:latin typeface="+mn-lt"/>
-                        </a:rPr>
-                        <a:t>, </a:t>
-                      </a:r>
-                      <a:r>
-                        <a:rPr lang="en-IN" sz="900" b="0" dirty="0">
-                          <a:latin typeface="+mn-lt"/>
-                          <a:cs typeface="Times New Roman" panose="02020603050405020304" pitchFamily="18" charset="0"/>
-                        </a:rPr>
-                        <a:t>introducing an artificial location reference that is not present in the source and distorting the original non-spatial philosophical statement.</a:t>
-                      </a:r>
-                    </a:p>
-                  </a:txBody>
-                  <a:tcPr marT="45721" marB="45721">
-                    <a:solidFill>
-                      <a:schemeClr val="accent1">
-                        <a:lumMod val="20000"/>
-                        <a:lumOff val="80000"/>
-                      </a:schemeClr>
-                    </a:solidFill>
-                  </a:tcPr>
+                  <a:tcPr marT="45721" marB="45721"/>
                 </a:tc>
                 <a:extLst>
                   <a:ext uri="{0D108BD9-81ED-4DB2-BD59-A6C34878D82A}">
@@ -3669,29 +3466,23 @@
                   </a:ext>
                 </a:extLst>
               </a:tr>
-              <a:tr h="961734">
+              <a:tr h="385182">
                 <a:tc>
                   <a:txBody>
                     <a:bodyPr/>
                     <a:lstStyle/>
                     <a:p>
                       <a:r>
-                        <a:rPr lang="en-GB" sz="900" b="1" dirty="0">
-                          <a:latin typeface="+mn-lt"/>
-                          <a:cs typeface="Times New Roman" panose="02020603050405020304" pitchFamily="18" charset="0"/>
-                        </a:rPr>
-                        <a:t>Person</a:t>
-                      </a:r>
+                        <a:rPr lang="en-GB" sz="700" b="1" dirty="0"/>
+                        <a:t>Number</a:t>
+                      </a:r>
+                      <a:endParaRPr lang="en-GB" sz="700" b="1" dirty="0">
+                        <a:latin typeface="+mn-lt"/>
+                        <a:cs typeface="Times New Roman" panose="02020603050405020304" pitchFamily="18" charset="0"/>
+                      </a:endParaRPr>
                     </a:p>
                   </a:txBody>
-                  <a:tcPr marT="45721" marB="45721">
-                    <a:solidFill>
-                      <a:schemeClr val="accent1">
-                        <a:lumMod val="20000"/>
-                        <a:lumOff val="80000"/>
-                      </a:schemeClr>
-                    </a:solidFill>
-                  </a:tcPr>
+                  <a:tcPr marT="45721" marB="45721"/>
                 </a:tc>
                 <a:tc>
                   <a:txBody>
@@ -3699,26 +3490,35 @@
                     <a:lstStyle/>
                     <a:p>
                       <a:r>
-                        <a:rPr lang="en-GB" sz="900" b="1" dirty="0" smtClean="0">
-                          <a:latin typeface="+mn-lt"/>
-                          <a:cs typeface="Times New Roman" panose="02020603050405020304" pitchFamily="18" charset="0"/>
-                        </a:rPr>
-                        <a:t>Qwen3</a:t>
-                      </a:r>
-                      <a:endParaRPr lang="en-GB" sz="900" b="1" dirty="0">
+                        <a:rPr lang="hi-IN" sz="700" b="0" kern="1200" dirty="0">
+                          <a:solidFill>
+                            <a:srgbClr val="FF0000"/>
+                          </a:solidFill>
+                          <a:effectLst/>
+                        </a:rPr>
+                        <a:t>2017 </a:t>
+                      </a:r>
+                      <a:r>
+                        <a:rPr lang="hi-IN" sz="700" b="0" kern="1200" dirty="0">
+                          <a:solidFill>
+                            <a:schemeClr val="dk1"/>
+                          </a:solidFill>
+                          <a:effectLst/>
+                        </a:rPr>
+                        <a:t>वर्षस्य उत्तरार्धे सिमनोफमहोदयः दूरदर्शनस्य क्युव्हीसी इति विपणिवाहिन्यां प्रकटीभूतः।</a:t>
+                      </a:r>
+                      <a:endParaRPr lang="hi-IN" sz="700" b="0" kern="1200" dirty="0">
+                        <a:solidFill>
+                          <a:schemeClr val="dk1"/>
+                        </a:solidFill>
+                        <a:effectLst/>
                         <a:latin typeface="+mn-lt"/>
-                        <a:cs typeface="Times New Roman" panose="02020603050405020304" pitchFamily="18" charset="0"/>
+                        <a:ea typeface="+mn-ea"/>
+                        <a:cs typeface="+mn-cs"/>
                       </a:endParaRPr>
                     </a:p>
                   </a:txBody>
-                  <a:tcPr marT="45721" marB="45721">
-                    <a:solidFill>
-                      <a:schemeClr val="accent1">
-                        <a:lumMod val="20000"/>
-                        <a:lumOff val="80000"/>
-                      </a:schemeClr>
-                    </a:solidFill>
-                  </a:tcPr>
+                  <a:tcPr marT="45721" marB="45721"/>
                 </a:tc>
                 <a:tc>
                   <a:txBody>
@@ -3726,75 +3526,35 @@
                     <a:lstStyle/>
                     <a:p>
                       <a:r>
-                        <a:rPr lang="hi-IN" sz="900" b="0" kern="1200" dirty="0">
+                        <a:rPr lang="hi-IN" sz="700" b="0" kern="1200" dirty="0">
+                          <a:solidFill>
+                            <a:srgbClr val="FF0000"/>
+                          </a:solidFill>
+                          <a:effectLst/>
+                        </a:rPr>
+                        <a:t>2007</a:t>
+                      </a:r>
+                      <a:r>
+                        <a:rPr lang="hi-IN" sz="700" b="0" kern="1200" dirty="0">
                           <a:solidFill>
                             <a:schemeClr val="dk1"/>
                           </a:solidFill>
                           <a:effectLst/>
-                          <a:latin typeface="+mn-lt"/>
-                          <a:ea typeface="+mn-ea"/>
-                          <a:cs typeface="+mn-cs"/>
-                        </a:rPr>
-                        <a:t>तस्मात्‌ </a:t>
-                      </a:r>
-                      <a:r>
-                        <a:rPr lang="hi-IN" sz="900" b="0" kern="1200" dirty="0">
-                          <a:solidFill>
-                            <a:srgbClr val="FF0000"/>
-                          </a:solidFill>
-                          <a:effectLst/>
-                          <a:latin typeface="+mn-lt"/>
-                          <a:ea typeface="+mn-ea"/>
-                          <a:cs typeface="+mn-cs"/>
-                        </a:rPr>
-                        <a:t>विश्वकर्मा</a:t>
-                      </a:r>
-                      <a:r>
-                        <a:rPr lang="hi-IN" sz="900" b="0" kern="1200" dirty="0">
-                          <a:solidFill>
-                            <a:schemeClr val="dk1"/>
-                          </a:solidFill>
-                          <a:effectLst/>
-                          <a:latin typeface="+mn-lt"/>
-                          <a:ea typeface="+mn-ea"/>
-                          <a:cs typeface="+mn-cs"/>
-                        </a:rPr>
-                        <a:t> </a:t>
-                      </a:r>
-                      <a:r>
-                        <a:rPr lang="hi-IN" sz="900" b="0" kern="1200" dirty="0">
-                          <a:solidFill>
-                            <a:srgbClr val="FF0000"/>
-                          </a:solidFill>
-                          <a:effectLst/>
-                          <a:latin typeface="+mn-lt"/>
-                          <a:ea typeface="+mn-ea"/>
-                          <a:cs typeface="+mn-cs"/>
-                        </a:rPr>
-                        <a:t>गर्जनं कुर्वन्तं</a:t>
-                      </a:r>
-                      <a:r>
-                        <a:rPr lang="hi-IN" sz="900" b="0" kern="1200" dirty="0">
-                          <a:solidFill>
-                            <a:schemeClr val="dk1"/>
-                          </a:solidFill>
-                          <a:effectLst/>
-                          <a:latin typeface="+mn-lt"/>
-                          <a:ea typeface="+mn-ea"/>
-                          <a:cs typeface="+mn-cs"/>
-                        </a:rPr>
-                        <a:t> वज्रं निर्मितवान्‌।</a:t>
-                      </a:r>
+                        </a:rPr>
+                        <a:t> के अंत में सिंमानोफ महोत्सव दुर्गम चैनल के क्वीवीसि बिक्री के माध्यम से प्रसारित हुए।</a:t>
+                      </a:r>
+                      <a:endParaRPr lang="hi-IN" sz="700" b="0" kern="1200" dirty="0">
+                        <a:solidFill>
+                          <a:schemeClr val="dk1"/>
+                        </a:solidFill>
+                        <a:effectLst/>
+                        <a:latin typeface="+mn-lt"/>
+                        <a:ea typeface="+mn-ea"/>
+                        <a:cs typeface="+mn-cs"/>
+                      </a:endParaRPr>
                     </a:p>
                   </a:txBody>
-                  <a:tcPr marT="45721" marB="45721">
-                    <a:solidFill>
-                      <a:schemeClr val="accent1">
-                        <a:lumMod val="20000"/>
-                        <a:lumOff val="80000"/>
-                      </a:schemeClr>
-                    </a:solidFill>
-                  </a:tcPr>
+                  <a:tcPr marT="45721" marB="45721"/>
                 </a:tc>
                 <a:tc>
                   <a:txBody>
@@ -3802,75 +3562,139 @@
                     <a:lstStyle/>
                     <a:p>
                       <a:r>
-                        <a:rPr lang="hi-IN" sz="900" b="0" kern="1200" dirty="0">
-                          <a:solidFill>
-                            <a:schemeClr val="dk1"/>
-                          </a:solidFill>
-                          <a:effectLst/>
-                          <a:latin typeface="+mn-lt"/>
-                          <a:ea typeface="+mn-ea"/>
-                          <a:cs typeface="+mn-cs"/>
-                        </a:rPr>
-                        <a:t>इसलिए </a:t>
-                      </a:r>
-                      <a:r>
-                        <a:rPr lang="hi-IN" sz="900" b="0" kern="1200" dirty="0">
-                          <a:solidFill>
-                            <a:srgbClr val="FF0000"/>
-                          </a:solidFill>
-                          <a:effectLst/>
-                          <a:latin typeface="+mn-lt"/>
-                          <a:ea typeface="+mn-ea"/>
-                          <a:cs typeface="+mn-cs"/>
-                        </a:rPr>
-                        <a:t>वैश्यकरमा घोषणा करते हुए वच्र</a:t>
-                      </a:r>
-                      <a:r>
-                        <a:rPr lang="hi-IN" sz="900" b="0" kern="1200" dirty="0">
-                          <a:solidFill>
-                            <a:schemeClr val="dk1"/>
-                          </a:solidFill>
-                          <a:effectLst/>
-                          <a:latin typeface="+mn-lt"/>
-                          <a:ea typeface="+mn-ea"/>
-                          <a:cs typeface="+mn-cs"/>
-                        </a:rPr>
-                        <a:t> की रचना </a:t>
-                      </a:r>
-                      <a:r>
-                        <a:rPr lang="hi-IN" sz="900" b="0" kern="1200" dirty="0">
-                          <a:solidFill>
-                            <a:srgbClr val="FF0000"/>
-                          </a:solidFill>
-                          <a:effectLst/>
-                          <a:latin typeface="+mn-lt"/>
-                          <a:ea typeface="+mn-ea"/>
-                          <a:cs typeface="+mn-cs"/>
-                        </a:rPr>
-                        <a:t>किल चला</a:t>
-                      </a:r>
-                      <a:r>
-                        <a:rPr lang="hi-IN" sz="900" b="0" kern="1200" dirty="0">
-                          <a:solidFill>
-                            <a:schemeClr val="dk1"/>
-                          </a:solidFill>
-                          <a:effectLst/>
-                          <a:latin typeface="+mn-lt"/>
-                          <a:ea typeface="+mn-ea"/>
-                          <a:cs typeface="+mn-cs"/>
-                        </a:rPr>
-                        <a:t>।</a:t>
-                      </a:r>
+                        <a:rPr lang="en-US" sz="800" b="0" dirty="0" smtClean="0"/>
+                        <a:t>The model hallucinates the numerical value by changing the year 2017 to 2007. </a:t>
+                      </a:r>
+                      <a:endParaRPr lang="en-US" sz="800" b="0" dirty="0">
+                        <a:latin typeface="+mn-lt"/>
+                        <a:cs typeface="Times New Roman" panose="02020603050405020304" pitchFamily="18" charset="0"/>
+                      </a:endParaRPr>
                     </a:p>
                   </a:txBody>
-                  <a:tcPr marT="45721" marB="45721">
-                    <a:solidFill>
-                      <a:schemeClr val="accent1">
-                        <a:lumMod val="20000"/>
-                        <a:lumOff val="80000"/>
-                      </a:schemeClr>
-                    </a:solidFill>
-                  </a:tcPr>
+                  <a:tcPr marT="45721" marB="45721"/>
+                </a:tc>
+                <a:extLst>
+                  <a:ext uri="{0D108BD9-81ED-4DB2-BD59-A6C34878D82A}">
+                    <a16:rowId xmlns:a16="http://schemas.microsoft.com/office/drawing/2014/main" xmlns="" val="10004"/>
+                  </a:ext>
+                </a:extLst>
+              </a:tr>
+              <a:tr h="427980">
+                <a:tc>
+                  <a:txBody>
+                    <a:bodyPr/>
+                    <a:lstStyle/>
+                    <a:p>
+                      <a:r>
+                        <a:rPr lang="en-GB" sz="700" b="1" dirty="0"/>
+                        <a:t>Person</a:t>
+                      </a:r>
+                      <a:endParaRPr lang="en-GB" sz="700" b="1" dirty="0">
+                        <a:latin typeface="+mn-lt"/>
+                        <a:cs typeface="Times New Roman" panose="02020603050405020304" pitchFamily="18" charset="0"/>
+                      </a:endParaRPr>
+                    </a:p>
+                  </a:txBody>
+                  <a:tcPr marT="45721" marB="45721"/>
+                </a:tc>
+                <a:tc>
+                  <a:txBody>
+                    <a:bodyPr/>
+                    <a:lstStyle/>
+                    <a:p>
+                      <a:r>
+                        <a:rPr lang="hi-IN" sz="700" b="0" kern="1200" dirty="0">
+                          <a:solidFill>
+                            <a:schemeClr val="dk1"/>
+                          </a:solidFill>
+                          <a:effectLst/>
+                        </a:rPr>
+                        <a:t>तस्मात्‌ </a:t>
+                      </a:r>
+                      <a:r>
+                        <a:rPr lang="hi-IN" sz="700" b="0" kern="1200" dirty="0">
+                          <a:solidFill>
+                            <a:srgbClr val="FF0000"/>
+                          </a:solidFill>
+                          <a:effectLst/>
+                        </a:rPr>
+                        <a:t>विश्वकर्मा</a:t>
+                      </a:r>
+                      <a:r>
+                        <a:rPr lang="hi-IN" sz="700" b="0" kern="1200" dirty="0">
+                          <a:solidFill>
+                            <a:schemeClr val="dk1"/>
+                          </a:solidFill>
+                          <a:effectLst/>
+                        </a:rPr>
+                        <a:t> </a:t>
+                      </a:r>
+                      <a:r>
+                        <a:rPr lang="hi-IN" sz="700" b="0" kern="1200" dirty="0">
+                          <a:solidFill>
+                            <a:schemeClr val="tx1"/>
+                          </a:solidFill>
+                          <a:effectLst/>
+                        </a:rPr>
+                        <a:t>गर्जनं कुर्वन्तं वज्रं निर्मितवान्‌।</a:t>
+                      </a:r>
+                      <a:endParaRPr lang="hi-IN" sz="700" b="0" kern="1200" dirty="0">
+                        <a:solidFill>
+                          <a:schemeClr val="tx1"/>
+                        </a:solidFill>
+                        <a:effectLst/>
+                        <a:latin typeface="+mn-lt"/>
+                        <a:ea typeface="+mn-ea"/>
+                        <a:cs typeface="+mn-cs"/>
+                      </a:endParaRPr>
+                    </a:p>
+                  </a:txBody>
+                  <a:tcPr marT="45721" marB="45721"/>
+                </a:tc>
+                <a:tc>
+                  <a:txBody>
+                    <a:bodyPr/>
+                    <a:lstStyle/>
+                    <a:p>
+                      <a:r>
+                        <a:rPr lang="hi-IN" sz="700" b="0" kern="1200" dirty="0">
+                          <a:solidFill>
+                            <a:schemeClr val="dk1"/>
+                          </a:solidFill>
+                          <a:effectLst/>
+                        </a:rPr>
+                        <a:t>इसलिए </a:t>
+                      </a:r>
+                      <a:r>
+                        <a:rPr lang="hi-IN" sz="700" b="0" kern="1200" dirty="0">
+                          <a:solidFill>
+                            <a:srgbClr val="FF0000"/>
+                          </a:solidFill>
+                          <a:effectLst/>
+                        </a:rPr>
+                        <a:t>वैश्यकरमा </a:t>
+                      </a:r>
+                      <a:r>
+                        <a:rPr lang="hi-IN" sz="700" b="0" kern="1200" dirty="0">
+                          <a:solidFill>
+                            <a:schemeClr val="tx1"/>
+                          </a:solidFill>
+                          <a:effectLst/>
+                        </a:rPr>
+                        <a:t>घोषणा करते हुए वच्र की रचना किल चला।</a:t>
+                      </a:r>
+                      <a:endParaRPr lang="hi-IN" sz="700" b="0" kern="1200" dirty="0">
+                        <a:solidFill>
+                          <a:schemeClr val="tx1"/>
+                        </a:solidFill>
+                        <a:effectLst/>
+                        <a:latin typeface="+mn-lt"/>
+                        <a:ea typeface="+mn-ea"/>
+                        <a:cs typeface="+mn-cs"/>
+                      </a:endParaRPr>
+                    </a:p>
+                  </a:txBody>
+                  <a:tcPr marT="45721" marB="45721"/>
                 </a:tc>
                 <a:tc>
                   <a:txBody>
@@ -3895,66 +3719,48 @@
                         <a:defRPr/>
                       </a:pPr>
                       <a:r>
-                        <a:rPr lang="en-US" sz="900" b="0" dirty="0">
-                          <a:latin typeface="+mn-lt"/>
-                          <a:cs typeface="Times New Roman" panose="02020603050405020304" pitchFamily="18" charset="0"/>
-                        </a:rPr>
-                        <a:t>The model hallucinates a fictional agent-action sequence by distorting “</a:t>
-                      </a:r>
-                      <a:r>
-                        <a:rPr lang="en-US" sz="900" b="0" dirty="0" err="1">
-                          <a:latin typeface="+mn-lt"/>
-                          <a:cs typeface="Times New Roman" panose="02020603050405020304" pitchFamily="18" charset="0"/>
-                        </a:rPr>
+                        <a:rPr lang="en-US" sz="800" b="0" dirty="0" smtClean="0"/>
+                        <a:t>The model hallucinates a named entity by incorrectly spelling the proper noun </a:t>
+                      </a:r>
+                      <a:r>
+                        <a:rPr lang="en-US" sz="800" b="0" dirty="0" err="1" smtClean="0"/>
                         <a:t>Vishwakarma</a:t>
                       </a:r>
                       <a:r>
-                        <a:rPr lang="en-US" sz="900" b="0" dirty="0">
-                          <a:latin typeface="+mn-lt"/>
-                          <a:cs typeface="Times New Roman" panose="02020603050405020304" pitchFamily="18" charset="0"/>
-                        </a:rPr>
-                        <a:t>” and turning a simple statement about forging a thunderbolt into an incoherent event with unrelated actions and non-existent narrative details.</a:t>
-                      </a:r>
+                        <a:rPr lang="en-US" sz="800" b="0" dirty="0" smtClean="0"/>
+                        <a:t>.</a:t>
+                      </a:r>
+                      <a:endParaRPr lang="en-US" sz="800" b="0" dirty="0">
+                        <a:latin typeface="+mn-lt"/>
+                        <a:cs typeface="Times New Roman" panose="02020603050405020304" pitchFamily="18" charset="0"/>
+                      </a:endParaRPr>
                     </a:p>
                   </a:txBody>
-                  <a:tcPr marT="45721" marB="45721">
-                    <a:solidFill>
-                      <a:schemeClr val="accent1">
-                        <a:lumMod val="20000"/>
-                        <a:lumOff val="80000"/>
-                      </a:schemeClr>
-                    </a:solidFill>
-                  </a:tcPr>
+                  <a:tcPr marT="45721" marB="45721"/>
                 </a:tc>
                 <a:extLst>
                   <a:ext uri="{0D108BD9-81ED-4DB2-BD59-A6C34878D82A}">
-                    <a16:rowId xmlns:a16="http://schemas.microsoft.com/office/drawing/2014/main" xmlns="" val="10003"/>
+                    <a16:rowId xmlns:a16="http://schemas.microsoft.com/office/drawing/2014/main" xmlns="" val="10006"/>
                   </a:ext>
                 </a:extLst>
               </a:tr>
-              <a:tr h="929406">
+              <a:tr h="684767">
                 <a:tc>
                   <a:txBody>
                     <a:bodyPr/>
                     <a:lstStyle/>
                     <a:p>
                       <a:r>
-                        <a:rPr lang="en-GB" sz="900" b="1" dirty="0">
-                          <a:latin typeface="+mn-lt"/>
-                          <a:cs typeface="Times New Roman" panose="02020603050405020304" pitchFamily="18" charset="0"/>
-                        </a:rPr>
-                        <a:t>Number</a:t>
-                      </a:r>
+                        <a:rPr lang="en-GB" sz="700" b="1" dirty="0"/>
+                        <a:t>Script</a:t>
+                      </a:r>
+                      <a:endParaRPr lang="en-GB" sz="700" b="1" dirty="0">
+                        <a:latin typeface="+mn-lt"/>
+                        <a:cs typeface="Times New Roman" panose="02020603050405020304" pitchFamily="18" charset="0"/>
+                      </a:endParaRPr>
                     </a:p>
                   </a:txBody>
-                  <a:tcPr marT="45721" marB="45721">
-                    <a:solidFill>
-                      <a:schemeClr val="accent1">
-                        <a:lumMod val="20000"/>
-                        <a:lumOff val="80000"/>
-                      </a:schemeClr>
-                    </a:solidFill>
-                  </a:tcPr>
+                  <a:tcPr marT="45721" marB="45721"/>
                 </a:tc>
                 <a:tc>
                   <a:txBody>
@@ -3962,207 +3768,17 @@
                     <a:lstStyle/>
                     <a:p>
                       <a:r>
-                        <a:rPr lang="en-GB" sz="900" b="1" dirty="0" smtClean="0">
-                          <a:latin typeface="+mn-lt"/>
-                          <a:cs typeface="Times New Roman" panose="02020603050405020304" pitchFamily="18" charset="0"/>
-                        </a:rPr>
-                        <a:t>Qwen3</a:t>
-                      </a:r>
-                      <a:endParaRPr lang="en-GB" sz="900" b="1" dirty="0">
-                        <a:latin typeface="+mn-lt"/>
-                        <a:cs typeface="Times New Roman" panose="02020603050405020304" pitchFamily="18" charset="0"/>
-                      </a:endParaRPr>
-                    </a:p>
-                  </a:txBody>
-                  <a:tcPr marT="45721" marB="45721">
-                    <a:solidFill>
-                      <a:schemeClr val="accent1">
-                        <a:lumMod val="20000"/>
-                        <a:lumOff val="80000"/>
-                      </a:schemeClr>
-                    </a:solidFill>
-                  </a:tcPr>
-                </a:tc>
-                <a:tc>
-                  <a:txBody>
-                    <a:bodyPr/>
-                    <a:lstStyle/>
-                    <a:p>
-                      <a:r>
-                        <a:rPr lang="hi-IN" sz="900" b="0" kern="1200" dirty="0">
-                          <a:solidFill>
-                            <a:srgbClr val="FF0000"/>
+                        <a:rPr lang="hi-IN" sz="700" b="0" kern="1200" dirty="0">
+                          <a:solidFill>
+                            <a:schemeClr val="dk1"/>
                           </a:solidFill>
                           <a:effectLst/>
-                          <a:latin typeface="+mn-lt"/>
-                          <a:ea typeface="+mn-ea"/>
-                          <a:cs typeface="+mn-cs"/>
-                        </a:rPr>
-                        <a:t>2017 </a:t>
-                      </a:r>
-                      <a:r>
-                        <a:rPr lang="hi-IN" sz="900" b="0" kern="1200" dirty="0">
-                          <a:solidFill>
-                            <a:schemeClr val="dk1"/>
-                          </a:solidFill>
-                          <a:effectLst/>
-                          <a:latin typeface="+mn-lt"/>
-                          <a:ea typeface="+mn-ea"/>
-                          <a:cs typeface="+mn-cs"/>
-                        </a:rPr>
-                        <a:t>वर्षस्य उत्तरार्धे सिमनोफमहोदयः दूरदर्शनस्य क्युव्हीसी इति विपणिवाहिन्यां प्रकटीभूतः।</a:t>
-                      </a:r>
-                    </a:p>
-                  </a:txBody>
-                  <a:tcPr marT="45721" marB="45721">
-                    <a:solidFill>
-                      <a:schemeClr val="accent1">
-                        <a:lumMod val="20000"/>
-                        <a:lumOff val="80000"/>
-                      </a:schemeClr>
-                    </a:solidFill>
-                  </a:tcPr>
-                </a:tc>
-                <a:tc>
-                  <a:txBody>
-                    <a:bodyPr/>
-                    <a:lstStyle/>
-                    <a:p>
-                      <a:r>
-                        <a:rPr lang="hi-IN" sz="900" b="0" kern="1200" dirty="0">
-                          <a:solidFill>
-                            <a:srgbClr val="FF0000"/>
-                          </a:solidFill>
-                          <a:effectLst/>
-                          <a:latin typeface="+mn-lt"/>
-                          <a:ea typeface="+mn-ea"/>
-                          <a:cs typeface="+mn-cs"/>
-                        </a:rPr>
-                        <a:t>2007</a:t>
-                      </a:r>
-                      <a:r>
-                        <a:rPr lang="hi-IN" sz="900" b="0" kern="1200" dirty="0">
-                          <a:solidFill>
-                            <a:schemeClr val="dk1"/>
-                          </a:solidFill>
-                          <a:effectLst/>
-                          <a:latin typeface="+mn-lt"/>
-                          <a:ea typeface="+mn-ea"/>
-                          <a:cs typeface="+mn-cs"/>
-                        </a:rPr>
-                        <a:t> के अंत में सिंमानोफ महोत्सव दुर्गम चैनल के क्वीवीसि बिक्री के माध्यम से प्रसारित हुए।</a:t>
-                      </a:r>
-                    </a:p>
-                  </a:txBody>
-                  <a:tcPr marT="45721" marB="45721">
-                    <a:solidFill>
-                      <a:schemeClr val="accent1">
-                        <a:lumMod val="20000"/>
-                        <a:lumOff val="80000"/>
-                      </a:schemeClr>
-                    </a:solidFill>
-                  </a:tcPr>
-                </a:tc>
-                <a:tc>
-                  <a:txBody>
-                    <a:bodyPr/>
-                    <a:lstStyle/>
-                    <a:p>
-                      <a:r>
-                        <a:rPr lang="en-US" sz="900" b="0" dirty="0">
-                          <a:latin typeface="+mn-lt"/>
-                          <a:cs typeface="Times New Roman" panose="02020603050405020304" pitchFamily="18" charset="0"/>
-                        </a:rPr>
-                        <a:t>The model hallucinates by changing the year, altering the named entity, and replacing the original broadcast appearance on a television channel with an incorrect and fabricated description involving different entities and an unrelated sales-based context.</a:t>
-                      </a:r>
-                    </a:p>
-                  </a:txBody>
-                  <a:tcPr marT="45721" marB="45721">
-                    <a:solidFill>
-                      <a:schemeClr val="accent1">
-                        <a:lumMod val="20000"/>
-                        <a:lumOff val="80000"/>
-                      </a:schemeClr>
-                    </a:solidFill>
-                  </a:tcPr>
-                </a:tc>
-                <a:extLst>
-                  <a:ext uri="{0D108BD9-81ED-4DB2-BD59-A6C34878D82A}">
-                    <a16:rowId xmlns:a16="http://schemas.microsoft.com/office/drawing/2014/main" xmlns="" val="10004"/>
-                  </a:ext>
-                </a:extLst>
-              </a:tr>
-              <a:tr h="1059304">
-                <a:tc>
-                  <a:txBody>
-                    <a:bodyPr/>
-                    <a:lstStyle/>
-                    <a:p>
-                      <a:r>
-                        <a:rPr lang="en-GB" sz="900" b="1" dirty="0">
-                          <a:latin typeface="+mn-lt"/>
-                          <a:cs typeface="Times New Roman" panose="02020603050405020304" pitchFamily="18" charset="0"/>
-                        </a:rPr>
-                        <a:t>Script</a:t>
-                      </a:r>
-                    </a:p>
-                  </a:txBody>
-                  <a:tcPr marT="45721" marB="45721">
-                    <a:solidFill>
-                      <a:schemeClr val="accent1">
-                        <a:lumMod val="20000"/>
-                        <a:lumOff val="80000"/>
-                      </a:schemeClr>
-                    </a:solidFill>
-                  </a:tcPr>
-                </a:tc>
-                <a:tc>
-                  <a:txBody>
-                    <a:bodyPr/>
-                    <a:lstStyle/>
-                    <a:p>
-                      <a:r>
-                        <a:rPr lang="en-GB" sz="900" b="1" dirty="0" smtClean="0">
-                          <a:latin typeface="+mn-lt"/>
-                          <a:cs typeface="Times New Roman" panose="02020603050405020304" pitchFamily="18" charset="0"/>
-                        </a:rPr>
-                        <a:t>Qwen3</a:t>
-                      </a:r>
-                      <a:endParaRPr lang="en-GB" sz="900" b="1" dirty="0">
-                        <a:latin typeface="+mn-lt"/>
-                        <a:cs typeface="Times New Roman" panose="02020603050405020304" pitchFamily="18" charset="0"/>
-                      </a:endParaRPr>
-                    </a:p>
-                  </a:txBody>
-                  <a:tcPr marT="45721" marB="45721">
-                    <a:solidFill>
-                      <a:schemeClr val="accent1">
-                        <a:lumMod val="20000"/>
-                        <a:lumOff val="80000"/>
-                      </a:schemeClr>
-                    </a:solidFill>
-                  </a:tcPr>
-                </a:tc>
-                <a:tc>
-                  <a:txBody>
-                    <a:bodyPr/>
-                    <a:lstStyle/>
-                    <a:p>
-                      <a:r>
-                        <a:rPr lang="hi-IN" sz="900" b="0" kern="1200" dirty="0">
-                          <a:solidFill>
-                            <a:schemeClr val="dk1"/>
-                          </a:solidFill>
-                          <a:effectLst/>
-                          <a:latin typeface="+mn-lt"/>
-                          <a:ea typeface="+mn-ea"/>
-                          <a:cs typeface="+mn-cs"/>
                         </a:rPr>
                         <a:t>यद्यपि प्लवपश्चात् जलस्तरः केचन फीटमात्रं वर्धिष्यति तर्हि अधिकारिणः आशासन्ते यत् नष्टानां मृदादण्डानां पुनर्स्थापनायै इदम् अलं भवेत्।</a:t>
                       </a:r>
                     </a:p>
                     <a:p>
-                      <a:endParaRPr lang="hi-IN" sz="900" b="0" kern="1200" dirty="0">
+                      <a:endParaRPr lang="hi-IN" sz="700" b="0" kern="1200" dirty="0">
                         <a:solidFill>
                           <a:schemeClr val="dk1"/>
                         </a:solidFill>
@@ -4173,14 +3789,7 @@
                       </a:endParaRPr>
                     </a:p>
                   </a:txBody>
-                  <a:tcPr marT="45721" marB="45721">
-                    <a:solidFill>
-                      <a:schemeClr val="accent1">
-                        <a:lumMod val="20000"/>
-                        <a:lumOff val="80000"/>
-                      </a:schemeClr>
-                    </a:solidFill>
-                  </a:tcPr>
+                  <a:tcPr marT="45721" marB="45721"/>
                 </a:tc>
                 <a:tc>
                   <a:txBody>
@@ -4188,92 +3797,71 @@
                     <a:lstStyle/>
                     <a:p>
                       <a:r>
-                        <a:rPr lang="hi-IN" sz="900" b="0" kern="1200" dirty="0">
+                        <a:rPr lang="hi-IN" sz="700" b="0" kern="1200" dirty="0">
                           <a:solidFill>
                             <a:schemeClr val="dk1"/>
                           </a:solidFill>
                           <a:effectLst/>
-                          <a:latin typeface="+mn-lt"/>
-                          <a:ea typeface="+mn-ea"/>
-                          <a:cs typeface="+mn-cs"/>
                         </a:rPr>
                         <a:t>अगर ज</a:t>
                       </a:r>
                       <a:r>
-                        <a:rPr lang="as-IN" sz="900" b="0" kern="1200" dirty="0">
+                        <a:rPr lang="as-IN" sz="700" b="0" kern="1200" dirty="0">
                           <a:solidFill>
                             <a:srgbClr val="FF0000"/>
                           </a:solidFill>
                           <a:effectLst/>
-                          <a:latin typeface="+mn-lt"/>
-                          <a:ea typeface="+mn-ea"/>
-                          <a:cs typeface="+mn-cs"/>
                         </a:rPr>
                         <a:t>ল</a:t>
                       </a:r>
                       <a:r>
-                        <a:rPr lang="as-IN" sz="900" b="0" kern="1200" dirty="0">
+                        <a:rPr lang="as-IN" sz="700" b="0" kern="1200" dirty="0">
                           <a:solidFill>
                             <a:schemeClr val="dk1"/>
                           </a:solidFill>
                           <a:effectLst/>
-                          <a:latin typeface="+mn-lt"/>
-                          <a:ea typeface="+mn-ea"/>
-                          <a:cs typeface="+mn-cs"/>
                         </a:rPr>
                         <a:t> </a:t>
                       </a:r>
                       <a:r>
-                        <a:rPr lang="hi-IN" sz="900" b="0" kern="1200" dirty="0">
+                        <a:rPr lang="hi-IN" sz="700" b="0" kern="1200" dirty="0">
                           <a:solidFill>
                             <a:schemeClr val="dk1"/>
                           </a:solidFill>
                           <a:effectLst/>
-                          <a:latin typeface="+mn-lt"/>
-                          <a:ea typeface="+mn-ea"/>
-                          <a:cs typeface="+mn-cs"/>
                         </a:rPr>
                         <a:t>स्त</a:t>
                       </a:r>
                       <a:r>
-                        <a:rPr lang="as-IN" sz="900" b="0" kern="1200" dirty="0">
+                        <a:rPr lang="as-IN" sz="700" b="0" kern="1200" dirty="0">
                           <a:solidFill>
                             <a:srgbClr val="FF0000"/>
                           </a:solidFill>
                           <a:effectLst/>
-                          <a:latin typeface="+mn-lt"/>
-                          <a:ea typeface="+mn-ea"/>
-                          <a:cs typeface="+mn-cs"/>
                         </a:rPr>
                         <a:t>র</a:t>
                       </a:r>
                       <a:r>
-                        <a:rPr lang="as-IN" sz="900" b="0" kern="1200" dirty="0">
+                        <a:rPr lang="as-IN" sz="700" b="0" kern="1200" dirty="0">
                           <a:solidFill>
                             <a:schemeClr val="dk1"/>
                           </a:solidFill>
                           <a:effectLst/>
-                          <a:latin typeface="+mn-lt"/>
-                          <a:ea typeface="+mn-ea"/>
-                          <a:cs typeface="+mn-cs"/>
                         </a:rPr>
                         <a:t> </a:t>
                       </a:r>
                       <a:r>
-                        <a:rPr lang="hi-IN" sz="900" b="0" kern="1200" dirty="0">
+                        <a:rPr lang="hi-IN" sz="700" b="0" kern="1200" dirty="0">
                           <a:solidFill>
                             <a:schemeClr val="dk1"/>
                           </a:solidFill>
                           <a:effectLst/>
-                          <a:latin typeface="+mn-lt"/>
-                          <a:ea typeface="+mn-ea"/>
-                          <a:cs typeface="+mn-cs"/>
                         </a:rPr>
                         <a:t>को लेख बाद एक फिट के लंबाई का वृध्दि हो जाए, तो उनके अभिमानी उम्मीद करते हैं कि नाशित और निर्माण के पुराने वस्था के स्थल पर इस अनुचितता को पुष्तक बनाए जा सकता हूँ।</a:t>
                       </a:r>
                     </a:p>
                     <a:p>
-                      <a:endParaRPr lang="hi-IN" sz="900" b="0" kern="1200" dirty="0">
+                      <a:endParaRPr lang="hi-IN" sz="700" b="0" kern="1200" dirty="0">
                         <a:solidFill>
                           <a:schemeClr val="dk1"/>
                         </a:solidFill>
@@ -4284,14 +3872,7 @@
                       </a:endParaRPr>
                     </a:p>
                   </a:txBody>
-                  <a:tcPr marT="45721" marB="45721">
-                    <a:solidFill>
-                      <a:schemeClr val="accent1">
-                        <a:lumMod val="20000"/>
-                        <a:lumOff val="80000"/>
-                      </a:schemeClr>
-                    </a:solidFill>
-                  </a:tcPr>
+                  <a:tcPr marT="45721" marB="45721"/>
                 </a:tc>
                 <a:tc>
                   <a:txBody>
@@ -4299,26 +3880,151 @@
                     <a:lstStyle/>
                     <a:p>
                       <a:r>
-                        <a:rPr lang="en-US" sz="900" b="0" dirty="0">
-                          <a:latin typeface="+mn-lt"/>
-                          <a:cs typeface="Times New Roman" panose="02020603050405020304" pitchFamily="18" charset="0"/>
-                        </a:rPr>
-                        <a:t>The model hallucinates by introducing script-level corruption and mistranslating key phrases into incorrect, mixed-language, and semantically distorted outputs that change both meaning and grammatical structure of the original sentence.</a:t>
-                      </a:r>
+                        <a:rPr lang="en-US" sz="800" b="0" dirty="0" smtClean="0"/>
+                        <a:t>The model hallucinates script consistency by inserting Bengali characters standard Devanagari text.</a:t>
+                      </a:r>
+                      <a:endParaRPr lang="en-US" sz="800" b="0" dirty="0">
+                        <a:latin typeface="+mn-lt"/>
+                        <a:cs typeface="Times New Roman" panose="02020603050405020304" pitchFamily="18" charset="0"/>
+                      </a:endParaRPr>
                     </a:p>
                   </a:txBody>
-                  <a:tcPr marT="45721" marB="45721">
-                    <a:solidFill>
-                      <a:schemeClr val="accent1">
-                        <a:lumMod val="20000"/>
-                        <a:lumOff val="80000"/>
-                      </a:schemeClr>
-                    </a:solidFill>
-                  </a:tcPr>
+                  <a:tcPr marT="45721" marB="45721"/>
                 </a:tc>
                 <a:extLst>
                   <a:ext uri="{0D108BD9-81ED-4DB2-BD59-A6C34878D82A}">
                     <a16:rowId xmlns:a16="http://schemas.microsoft.com/office/drawing/2014/main" xmlns="" val="10005"/>
+                  </a:ext>
+                </a:extLst>
+              </a:tr>
+              <a:tr h="617623">
+                <a:tc>
+                  <a:txBody>
+                    <a:bodyPr/>
+                    <a:lstStyle/>
+                    <a:p>
+                      <a:r>
+                        <a:rPr lang="en-GB" sz="700" b="1" dirty="0"/>
+                        <a:t>Tense</a:t>
+                      </a:r>
+                      <a:endParaRPr lang="en-GB" sz="700" b="1" dirty="0">
+                        <a:latin typeface="+mn-lt"/>
+                        <a:cs typeface="Times New Roman" panose="02020603050405020304" pitchFamily="18" charset="0"/>
+                      </a:endParaRPr>
+                    </a:p>
+                  </a:txBody>
+                  <a:tcPr marT="45721" marB="45721"/>
+                </a:tc>
+                <a:tc>
+                  <a:txBody>
+                    <a:bodyPr/>
+                    <a:lstStyle/>
+                    <a:p>
+                      <a:r>
+                        <a:rPr lang="hi-IN" sz="700" b="0" kern="1200" dirty="0">
+                          <a:solidFill>
+                            <a:schemeClr val="dk1"/>
+                          </a:solidFill>
+                          <a:effectLst/>
+                        </a:rPr>
+                        <a:t>एतेषां निष्कर्षाणां १ प्रकारमधुमेहग्रस्तैः सह कमपि सम्बन्धं नास्ति इत्यस्य आलोकनानन्तरं अन्ये निपुणाः इव सः अपि </a:t>
+                      </a:r>
+                      <a:r>
+                        <a:rPr lang="hi-IN" sz="700" b="0" kern="1200" dirty="0">
+                          <a:solidFill>
+                            <a:srgbClr val="FF0000"/>
+                          </a:solidFill>
+                          <a:effectLst/>
+                        </a:rPr>
+                        <a:t>शङ्क्यते</a:t>
+                      </a:r>
+                      <a:r>
+                        <a:rPr lang="hi-IN" sz="700" b="0" kern="1200" dirty="0">
+                          <a:solidFill>
+                            <a:schemeClr val="dk1"/>
+                          </a:solidFill>
+                          <a:effectLst/>
+                        </a:rPr>
+                        <a:t> यत् मधुमेहं उपशामयितुं शक्यते वा |</a:t>
+                      </a:r>
+                      <a:endParaRPr lang="hi-IN" sz="700" b="0" kern="1200" dirty="0">
+                        <a:solidFill>
+                          <a:schemeClr val="dk1"/>
+                        </a:solidFill>
+                        <a:effectLst/>
+                        <a:latin typeface="+mn-lt"/>
+                        <a:ea typeface="+mn-ea"/>
+                        <a:cs typeface="+mn-cs"/>
+                      </a:endParaRPr>
+                    </a:p>
+                  </a:txBody>
+                  <a:tcPr marT="45721" marB="45721"/>
+                </a:tc>
+                <a:tc>
+                  <a:txBody>
+                    <a:bodyPr/>
+                    <a:lstStyle/>
+                    <a:p>
+                      <a:r>
+                        <a:rPr lang="hi-IN" sz="700" b="0" kern="1200" dirty="0">
+                          <a:solidFill>
+                            <a:schemeClr val="dk1"/>
+                          </a:solidFill>
+                          <a:effectLst/>
+                        </a:rPr>
+                        <a:t>इन निष्कर्षों में प्रकार‑१ मधुमेह के साथ किसी भी प्रकार का संबंध नहीं पाया गया, और इसे उजागर करने के बाद अन्य निपुणों ने भी यह </a:t>
+                      </a:r>
+                      <a:r>
+                        <a:rPr lang="hi-IN" sz="700" b="0" kern="1200" dirty="0">
+                          <a:solidFill>
+                            <a:srgbClr val="FF0000"/>
+                          </a:solidFill>
+                          <a:effectLst/>
+                        </a:rPr>
+                        <a:t>प्रश्न उठाया </a:t>
+                      </a:r>
+                      <a:r>
+                        <a:rPr lang="hi-IN" sz="700" b="0" kern="1200" dirty="0">
+                          <a:solidFill>
+                            <a:schemeClr val="dk1"/>
+                          </a:solidFill>
+                          <a:effectLst/>
+                        </a:rPr>
+                        <a:t>कि क्या मधुमेह का उपशामन सम्भव है।</a:t>
+                      </a:r>
+                      <a:endParaRPr lang="hi-IN" sz="700" b="0" kern="1200" dirty="0">
+                        <a:solidFill>
+                          <a:schemeClr val="dk1"/>
+                        </a:solidFill>
+                        <a:effectLst/>
+                        <a:latin typeface="+mn-lt"/>
+                        <a:ea typeface="+mn-ea"/>
+                        <a:cs typeface="+mn-cs"/>
+                      </a:endParaRPr>
+                    </a:p>
+                  </a:txBody>
+                  <a:tcPr marT="45721" marB="45721"/>
+                </a:tc>
+                <a:tc>
+                  <a:txBody>
+                    <a:bodyPr/>
+                    <a:lstStyle/>
+                    <a:p>
+                      <a:r>
+                        <a:rPr lang="en-US" sz="800" b="0" smtClean="0"/>
+                        <a:t>The model hallucinates the grammatical tense by converting a present tense verb into a past tense action.</a:t>
+                      </a:r>
+                      <a:endParaRPr lang="en-US" sz="800" b="0" dirty="0">
+                        <a:latin typeface="+mn-lt"/>
+                        <a:cs typeface="Times New Roman" panose="02020603050405020304" pitchFamily="18" charset="0"/>
+                      </a:endParaRPr>
+                    </a:p>
+                  </a:txBody>
+                  <a:tcPr marT="45721" marB="45721"/>
+                </a:tc>
+                <a:extLst>
+                  <a:ext uri="{0D108BD9-81ED-4DB2-BD59-A6C34878D82A}">
+                    <a16:rowId xmlns:a16="http://schemas.microsoft.com/office/drawing/2014/main" xmlns="" val="10007"/>
                   </a:ext>
                 </a:extLst>
               </a:tr>
